--- a/DEV-1-16/for_students/DAY-2/ppt/dev1_09.pptx
+++ b/DEV-1-16/for_students/DAY-2/ppt/dev1_09.pptx
@@ -268,7 +268,7 @@
           <a:p>
             <a:fld id="{EF790F8C-5FB9-4EFE-BCC7-F735A3026FD8}" type="datetimeFigureOut">
               <a:rPr lang="ru-RU" smtClean="0"/>
-              <a:t>20.09.2024</a:t>
+              <a:t>11.12.2025</a:t>
             </a:fld>
             <a:endParaRPr lang="ru-RU"/>
           </a:p>
@@ -466,7 +466,7 @@
           <a:p>
             <a:fld id="{EF790F8C-5FB9-4EFE-BCC7-F735A3026FD8}" type="datetimeFigureOut">
               <a:rPr lang="ru-RU" smtClean="0"/>
-              <a:t>20.09.2024</a:t>
+              <a:t>11.12.2025</a:t>
             </a:fld>
             <a:endParaRPr lang="ru-RU"/>
           </a:p>
@@ -674,7 +674,7 @@
           <a:p>
             <a:fld id="{EF790F8C-5FB9-4EFE-BCC7-F735A3026FD8}" type="datetimeFigureOut">
               <a:rPr lang="ru-RU" smtClean="0"/>
-              <a:t>20.09.2024</a:t>
+              <a:t>11.12.2025</a:t>
             </a:fld>
             <a:endParaRPr lang="ru-RU"/>
           </a:p>
@@ -1686,7 +1686,7 @@
           <a:p>
             <a:fld id="{EF790F8C-5FB9-4EFE-BCC7-F735A3026FD8}" type="datetimeFigureOut">
               <a:rPr lang="ru-RU" smtClean="0"/>
-              <a:t>20.09.2024</a:t>
+              <a:t>11.12.2025</a:t>
             </a:fld>
             <a:endParaRPr lang="ru-RU"/>
           </a:p>
@@ -2797,7 +2797,7 @@
           <a:p>
             <a:fld id="{EF790F8C-5FB9-4EFE-BCC7-F735A3026FD8}" type="datetimeFigureOut">
               <a:rPr lang="ru-RU" smtClean="0"/>
-              <a:t>20.09.2024</a:t>
+              <a:t>11.12.2025</a:t>
             </a:fld>
             <a:endParaRPr lang="ru-RU"/>
           </a:p>
@@ -3072,7 +3072,7 @@
           <a:p>
             <a:fld id="{EF790F8C-5FB9-4EFE-BCC7-F735A3026FD8}" type="datetimeFigureOut">
               <a:rPr lang="ru-RU" smtClean="0"/>
-              <a:t>20.09.2024</a:t>
+              <a:t>11.12.2025</a:t>
             </a:fld>
             <a:endParaRPr lang="ru-RU"/>
           </a:p>
@@ -3337,7 +3337,7 @@
           <a:p>
             <a:fld id="{EF790F8C-5FB9-4EFE-BCC7-F735A3026FD8}" type="datetimeFigureOut">
               <a:rPr lang="ru-RU" smtClean="0"/>
-              <a:t>20.09.2024</a:t>
+              <a:t>11.12.2025</a:t>
             </a:fld>
             <a:endParaRPr lang="ru-RU"/>
           </a:p>
@@ -3749,7 +3749,7 @@
           <a:p>
             <a:fld id="{EF790F8C-5FB9-4EFE-BCC7-F735A3026FD8}" type="datetimeFigureOut">
               <a:rPr lang="ru-RU" smtClean="0"/>
-              <a:t>20.09.2024</a:t>
+              <a:t>11.12.2025</a:t>
             </a:fld>
             <a:endParaRPr lang="ru-RU"/>
           </a:p>
@@ -3890,7 +3890,7 @@
           <a:p>
             <a:fld id="{EF790F8C-5FB9-4EFE-BCC7-F735A3026FD8}" type="datetimeFigureOut">
               <a:rPr lang="ru-RU" smtClean="0"/>
-              <a:t>20.09.2024</a:t>
+              <a:t>11.12.2025</a:t>
             </a:fld>
             <a:endParaRPr lang="ru-RU"/>
           </a:p>
@@ -4003,7 +4003,7 @@
           <a:p>
             <a:fld id="{EF790F8C-5FB9-4EFE-BCC7-F735A3026FD8}" type="datetimeFigureOut">
               <a:rPr lang="ru-RU" smtClean="0"/>
-              <a:t>20.09.2024</a:t>
+              <a:t>11.12.2025</a:t>
             </a:fld>
             <a:endParaRPr lang="ru-RU"/>
           </a:p>
@@ -4314,7 +4314,7 @@
           <a:p>
             <a:fld id="{EF790F8C-5FB9-4EFE-BCC7-F735A3026FD8}" type="datetimeFigureOut">
               <a:rPr lang="ru-RU" smtClean="0"/>
-              <a:t>20.09.2024</a:t>
+              <a:t>11.12.2025</a:t>
             </a:fld>
             <a:endParaRPr lang="ru-RU"/>
           </a:p>
@@ -4602,7 +4602,7 @@
           <a:p>
             <a:fld id="{EF790F8C-5FB9-4EFE-BCC7-F735A3026FD8}" type="datetimeFigureOut">
               <a:rPr lang="ru-RU" smtClean="0"/>
-              <a:t>20.09.2024</a:t>
+              <a:t>11.12.2025</a:t>
             </a:fld>
             <a:endParaRPr lang="ru-RU"/>
           </a:p>
@@ -4843,7 +4843,7 @@
           <a:p>
             <a:fld id="{EF790F8C-5FB9-4EFE-BCC7-F735A3026FD8}" type="datetimeFigureOut">
               <a:rPr lang="ru-RU" smtClean="0"/>
-              <a:t>20.09.2024</a:t>
+              <a:t>11.12.2025</a:t>
             </a:fld>
             <a:endParaRPr lang="ru-RU"/>
           </a:p>
@@ -6005,7 +6005,7 @@
 </file>
 
 <file path=ppt/slides/slide1.xml><?xml version="1.0" encoding="utf-8"?>
-<p:sld xmlns:a="http://schemas.openxmlformats.org/drawingml/2006/main" xmlns:r="http://schemas.openxmlformats.org/officeDocument/2006/relationships" xmlns:p="http://schemas.openxmlformats.org/presentationml/2006/main">
+<p:sld xmlns:a="http://schemas.openxmlformats.org/drawingml/2006/main" xmlns:r="http://schemas.openxmlformats.org/officeDocument/2006/relationships" xmlns:p="http://schemas.openxmlformats.org/presentationml/2006/main" showMasterSp="0">
   <p:cSld>
     <p:spTree>
       <p:nvGrpSpPr>
